--- a/generated/Tier 1 Broker Scorecards/Stellar Management, Inc_Broker_Scorecard.pptx
+++ b/generated/Tier 1 Broker Scorecards/Stellar Management, Inc_Broker_Scorecard.pptx
@@ -3357,7 +3357,7 @@
                         <a:rPr sz="800">
                           <a:latin typeface="Segoe UI"/>
                         </a:rPr>
-                        <a:t>$2,606,142.41 / $2,355,956.42 / $683,912.60</a:t>
+                        <a:t>$2,606,142.41 / $2,359,576.38 / $687,532.56</a:t>
                       </a:r>
                     </a:p>
                   </a:txBody>
@@ -3394,7 +3394,7 @@
                         <a:rPr sz="900">
                           <a:latin typeface="Segoe UI"/>
                         </a:rPr>
-                        <a:t>Tier 1  |  2.77% / 15.00%</a:t>
+                        <a:t>Tier 1  |  2.97% / 15.00%</a:t>
                       </a:r>
                     </a:p>
                   </a:txBody>
@@ -3431,7 +3431,7 @@
                         <a:rPr sz="900">
                           <a:latin typeface="Segoe UI"/>
                         </a:rPr>
-                        <a:t>$3,648,599.37  (18.7% achieved)</a:t>
+                        <a:t>$3,648,599.37  (18.8% achieved)</a:t>
                       </a:r>
                     </a:p>
                   </a:txBody>
@@ -3690,7 +3690,7 @@
                         <a:rPr sz="900">
                           <a:latin typeface="Segoe UI"/>
                         </a:rPr>
-                        <a:t>Fleet Bound Premium: $353,403.06</a:t>
+                        <a:t>Fleet Bound Premium: $324,350.30</a:t>
                       </a:r>
                     </a:p>
                   </a:txBody>
@@ -3727,7 +3727,7 @@
                         <a:rPr sz="900">
                           <a:latin typeface="Segoe UI"/>
                         </a:rPr>
-                        <a:t>Fleet Book %: 51.7%</a:t>
+                        <a:t>Fleet Book %: 47.2%</a:t>
                       </a:r>
                     </a:p>
                   </a:txBody>
@@ -3766,7 +3766,7 @@
                         <a:rPr sz="900">
                           <a:latin typeface="Segoe UI"/>
                         </a:rPr>
-                        <a:t>Non-Fleet Subs: 762  |  Binds: 20</a:t>
+                        <a:t>Non-Fleet Subs: 771  |  Binds: 22</a:t>
                       </a:r>
                     </a:p>
                   </a:txBody>
@@ -3803,7 +3803,7 @@
                         <a:rPr sz="900">
                           <a:latin typeface="Segoe UI"/>
                         </a:rPr>
-                        <a:t>Non-Fleet Bound Premium: $330,509.54</a:t>
+                        <a:t>Non-Fleet Bound Premium: $363,182.26</a:t>
                       </a:r>
                     </a:p>
                   </a:txBody>
@@ -3840,7 +3840,7 @@
                         <a:rPr sz="900">
                           <a:latin typeface="Segoe UI"/>
                         </a:rPr>
-                        <a:t>Non-Fleet Book %: 48.3%</a:t>
+                        <a:t>Non-Fleet Book %: 52.8%</a:t>
                       </a:r>
                     </a:p>
                   </a:txBody>
@@ -4428,7 +4428,7 @@
                           </a:solidFill>
                           <a:latin typeface="Segoe UI"/>
                         </a:rPr>
-                        <a:t>125</a:t>
+                        <a:t>134</a:t>
                       </a:r>
                     </a:p>
                   </a:txBody>
@@ -4707,7 +4707,7 @@
                           </a:solidFill>
                           <a:latin typeface="Segoe UI"/>
                         </a:rPr>
-                        <a:t>2.4%</a:t>
+                        <a:t>3.0%</a:t>
                       </a:r>
                     </a:p>
                   </a:txBody>
@@ -4983,7 +4983,7 @@
                           </a:solidFill>
                           <a:latin typeface="Segoe UI"/>
                         </a:rPr>
-                        <a:t>3</a:t>
+                        <a:t>4</a:t>
                       </a:r>
                     </a:p>
                   </a:txBody>
@@ -5262,7 +5262,7 @@
                           </a:solidFill>
                           <a:latin typeface="Segoe UI"/>
                         </a:rPr>
-                        <a:t>$30.4K</a:t>
+                        <a:t>$34.1K</a:t>
                       </a:r>
                     </a:p>
                   </a:txBody>

--- a/generated/Tier 1 Broker Scorecards/Stellar Management, Inc_Broker_Scorecard.pptx
+++ b/generated/Tier 1 Broker Scorecards/Stellar Management, Inc_Broker_Scorecard.pptx
@@ -3394,7 +3394,7 @@
                         <a:rPr sz="900">
                           <a:latin typeface="Segoe UI"/>
                         </a:rPr>
-                        <a:t>Tier 1  |  2.97% / 15.00%</a:t>
+                        <a:t>Tier 1  |  2.60% / 15.00%</a:t>
                       </a:r>
                     </a:p>
                   </a:txBody>
@@ -3653,7 +3653,7 @@
                         <a:rPr sz="900">
                           <a:latin typeface="Segoe UI"/>
                         </a:rPr>
-                        <a:t>Fleet Subs: 105  |  Binds: 4</a:t>
+                        <a:t>Fleet Subs: 105  |  Binds: 2</a:t>
                       </a:r>
                     </a:p>
                   </a:txBody>
@@ -3690,7 +3690,7 @@
                         <a:rPr sz="900">
                           <a:latin typeface="Segoe UI"/>
                         </a:rPr>
-                        <a:t>Fleet Bound Premium: $324,350.30</a:t>
+                        <a:t>Fleet Bound Premium: $205,488.37</a:t>
                       </a:r>
                     </a:p>
                   </a:txBody>
@@ -3727,7 +3727,7 @@
                         <a:rPr sz="900">
                           <a:latin typeface="Segoe UI"/>
                         </a:rPr>
-                        <a:t>Fleet Book %: 47.2%</a:t>
+                        <a:t>Fleet Book %: 29.9%</a:t>
                       </a:r>
                     </a:p>
                   </a:txBody>
@@ -3766,7 +3766,7 @@
                         <a:rPr sz="900">
                           <a:latin typeface="Segoe UI"/>
                         </a:rPr>
-                        <a:t>Non-Fleet Subs: 771  |  Binds: 22</a:t>
+                        <a:t>Non-Fleet Subs: 778  |  Binds: 21</a:t>
                       </a:r>
                     </a:p>
                   </a:txBody>
@@ -3803,7 +3803,7 @@
                         <a:rPr sz="900">
                           <a:latin typeface="Segoe UI"/>
                         </a:rPr>
-                        <a:t>Non-Fleet Bound Premium: $363,182.26</a:t>
+                        <a:t>Non-Fleet Bound Premium: $482,044.19</a:t>
                       </a:r>
                     </a:p>
                   </a:txBody>
@@ -3840,7 +3840,7 @@
                         <a:rPr sz="900">
                           <a:latin typeface="Segoe UI"/>
                         </a:rPr>
-                        <a:t>Non-Fleet Book %: 52.8%</a:t>
+                        <a:t>Non-Fleet Book %: 70.1%</a:t>
                       </a:r>
                     </a:p>
                   </a:txBody>
@@ -4428,7 +4428,7 @@
                           </a:solidFill>
                           <a:latin typeface="Segoe UI"/>
                         </a:rPr>
-                        <a:t>134</a:t>
+                        <a:t>141</a:t>
                       </a:r>
                     </a:p>
                   </a:txBody>
@@ -4707,7 +4707,7 @@
                           </a:solidFill>
                           <a:latin typeface="Segoe UI"/>
                         </a:rPr>
-                        <a:t>3.0%</a:t>
+                        <a:t>2.1%</a:t>
                       </a:r>
                     </a:p>
                   </a:txBody>
@@ -4983,7 +4983,7 @@
                           </a:solidFill>
                           <a:latin typeface="Segoe UI"/>
                         </a:rPr>
-                        <a:t>4</a:t>
+                        <a:t>3</a:t>
                       </a:r>
                     </a:p>
                   </a:txBody>

--- a/generated/Tier 1 Broker Scorecards/Stellar Management, Inc_Broker_Scorecard.pptx
+++ b/generated/Tier 1 Broker Scorecards/Stellar Management, Inc_Broker_Scorecard.pptx
@@ -3394,7 +3394,7 @@
                         <a:rPr sz="900">
                           <a:latin typeface="Segoe UI"/>
                         </a:rPr>
-                        <a:t>Tier 1  |  2.60% / 15.00%</a:t>
+                        <a:t>Tier 1  |  2.81% / 15.00%</a:t>
                       </a:r>
                     </a:p>
                   </a:txBody>
@@ -3653,7 +3653,7 @@
                         <a:rPr sz="900">
                           <a:latin typeface="Segoe UI"/>
                         </a:rPr>
-                        <a:t>Fleet Subs: 105  |  Binds: 2</a:t>
+                        <a:t>Fleet Subs: 106  |  Binds: 3</a:t>
                       </a:r>
                     </a:p>
                   </a:txBody>
@@ -3690,7 +3690,7 @@
                         <a:rPr sz="900">
                           <a:latin typeface="Segoe UI"/>
                         </a:rPr>
-                        <a:t>Fleet Bound Premium: $205,488.37</a:t>
+                        <a:t>Fleet Bound Premium: $247,140.52</a:t>
                       </a:r>
                     </a:p>
                   </a:txBody>
@@ -3727,7 +3727,7 @@
                         <a:rPr sz="900">
                           <a:latin typeface="Segoe UI"/>
                         </a:rPr>
-                        <a:t>Fleet Book %: 29.9%</a:t>
+                        <a:t>Fleet Book %: 35.9%</a:t>
                       </a:r>
                     </a:p>
                   </a:txBody>
@@ -3766,7 +3766,7 @@
                         <a:rPr sz="900">
                           <a:latin typeface="Segoe UI"/>
                         </a:rPr>
-                        <a:t>Non-Fleet Subs: 778  |  Binds: 21</a:t>
+                        <a:t>Non-Fleet Subs: 785  |  Binds: 22</a:t>
                       </a:r>
                     </a:p>
                   </a:txBody>
@@ -3803,7 +3803,7 @@
                         <a:rPr sz="900">
                           <a:latin typeface="Segoe UI"/>
                         </a:rPr>
-                        <a:t>Non-Fleet Bound Premium: $482,044.19</a:t>
+                        <a:t>Non-Fleet Bound Premium: $440,392.04</a:t>
                       </a:r>
                     </a:p>
                   </a:txBody>
@@ -3840,7 +3840,7 @@
                         <a:rPr sz="900">
                           <a:latin typeface="Segoe UI"/>
                         </a:rPr>
-                        <a:t>Non-Fleet Book %: 70.1%</a:t>
+                        <a:t>Non-Fleet Book %: 64.1%</a:t>
                       </a:r>
                     </a:p>
                   </a:txBody>
@@ -4428,7 +4428,7 @@
                           </a:solidFill>
                           <a:latin typeface="Segoe UI"/>
                         </a:rPr>
-                        <a:t>141</a:t>
+                        <a:t>149</a:t>
                       </a:r>
                     </a:p>
                   </a:txBody>
@@ -4707,7 +4707,7 @@
                           </a:solidFill>
                           <a:latin typeface="Segoe UI"/>
                         </a:rPr>
-                        <a:t>2.1%</a:t>
+                        <a:t>2.0%</a:t>
                       </a:r>
                     </a:p>
                   </a:txBody>

--- a/generated/Tier 1 Broker Scorecards/Stellar Management, Inc_Broker_Scorecard.pptx
+++ b/generated/Tier 1 Broker Scorecards/Stellar Management, Inc_Broker_Scorecard.pptx
@@ -3357,7 +3357,7 @@
                         <a:rPr sz="800">
                           <a:latin typeface="Segoe UI"/>
                         </a:rPr>
-                        <a:t>$2,606,142.41 / $2,359,576.38 / $687,532.56</a:t>
+                        <a:t>$2,606,142.41 / $2,378,115.73 / $706,071.91</a:t>
                       </a:r>
                     </a:p>
                   </a:txBody>
@@ -3394,7 +3394,7 @@
                         <a:rPr sz="900">
                           <a:latin typeface="Segoe UI"/>
                         </a:rPr>
-                        <a:t>Tier 1  |  2.81% / 15.00%</a:t>
+                        <a:t>Tier 1  |  2.78% / 15.00%</a:t>
                       </a:r>
                     </a:p>
                   </a:txBody>
@@ -3431,7 +3431,7 @@
                         <a:rPr sz="900">
                           <a:latin typeface="Segoe UI"/>
                         </a:rPr>
-                        <a:t>$3,648,599.37  (18.8% achieved)</a:t>
+                        <a:t>$3,648,599.37  (19.4% achieved)</a:t>
                       </a:r>
                     </a:p>
                   </a:txBody>
@@ -3653,7 +3653,7 @@
                         <a:rPr sz="900">
                           <a:latin typeface="Segoe UI"/>
                         </a:rPr>
-                        <a:t>Fleet Subs: 106  |  Binds: 3</a:t>
+                        <a:t>Fleet Subs: 107  |  Binds: 3</a:t>
                       </a:r>
                     </a:p>
                   </a:txBody>
@@ -3690,7 +3690,7 @@
                         <a:rPr sz="900">
                           <a:latin typeface="Segoe UI"/>
                         </a:rPr>
-                        <a:t>Fleet Bound Premium: $247,140.52</a:t>
+                        <a:t>Fleet Bound Premium: $294,600.21</a:t>
                       </a:r>
                     </a:p>
                   </a:txBody>
@@ -3727,7 +3727,7 @@
                         <a:rPr sz="900">
                           <a:latin typeface="Segoe UI"/>
                         </a:rPr>
-                        <a:t>Fleet Book %: 35.9%</a:t>
+                        <a:t>Fleet Book %: 41.7%</a:t>
                       </a:r>
                     </a:p>
                   </a:txBody>
@@ -3766,7 +3766,7 @@
                         <a:rPr sz="900">
                           <a:latin typeface="Segoe UI"/>
                         </a:rPr>
-                        <a:t>Non-Fleet Subs: 785  |  Binds: 22</a:t>
+                        <a:t>Non-Fleet Subs: 793  |  Binds: 22</a:t>
                       </a:r>
                     </a:p>
                   </a:txBody>
@@ -3803,7 +3803,7 @@
                         <a:rPr sz="900">
                           <a:latin typeface="Segoe UI"/>
                         </a:rPr>
-                        <a:t>Non-Fleet Bound Premium: $440,392.04</a:t>
+                        <a:t>Non-Fleet Bound Premium: $411,471.70</a:t>
                       </a:r>
                     </a:p>
                   </a:txBody>
@@ -3840,7 +3840,7 @@
                         <a:rPr sz="900">
                           <a:latin typeface="Segoe UI"/>
                         </a:rPr>
-                        <a:t>Non-Fleet Book %: 64.1%</a:t>
+                        <a:t>Non-Fleet Book %: 58.3%</a:t>
                       </a:r>
                     </a:p>
                   </a:txBody>
@@ -4424,11 +4424,11 @@
                       <a:r>
                         <a:rPr sz="800">
                           <a:solidFill>
-                            <a:srgbClr val="DC2626"/>
+                            <a:srgbClr val="059669"/>
                           </a:solidFill>
                           <a:latin typeface="Segoe UI"/>
                         </a:rPr>
-                        <a:t>149</a:t>
+                        <a:t>158</a:t>
                       </a:r>
                     </a:p>
                   </a:txBody>
@@ -4707,7 +4707,7 @@
                           </a:solidFill>
                           <a:latin typeface="Segoe UI"/>
                         </a:rPr>
-                        <a:t>2.0%</a:t>
+                        <a:t>3.2%</a:t>
                       </a:r>
                     </a:p>
                   </a:txBody>
@@ -4983,7 +4983,7 @@
                           </a:solidFill>
                           <a:latin typeface="Segoe UI"/>
                         </a:rPr>
-                        <a:t>3</a:t>
+                        <a:t>5</a:t>
                       </a:r>
                     </a:p>
                   </a:txBody>
@@ -5262,7 +5262,7 @@
                           </a:solidFill>
                           <a:latin typeface="Segoe UI"/>
                         </a:rPr>
-                        <a:t>$34.1K</a:t>
+                        <a:t>$52.6K</a:t>
                       </a:r>
                     </a:p>
                   </a:txBody>

--- a/generated/Tier 1 Broker Scorecards/Stellar Management, Inc_Broker_Scorecard.pptx
+++ b/generated/Tier 1 Broker Scorecards/Stellar Management, Inc_Broker_Scorecard.pptx
@@ -3394,7 +3394,7 @@
                         <a:rPr sz="900">
                           <a:latin typeface="Segoe UI"/>
                         </a:rPr>
-                        <a:t>Tier 1  |  2.78% / 15.00%</a:t>
+                        <a:t>Tier 1  |  2.74% / 15.00%</a:t>
                       </a:r>
                     </a:p>
                   </a:txBody>
@@ -3653,7 +3653,7 @@
                         <a:rPr sz="900">
                           <a:latin typeface="Segoe UI"/>
                         </a:rPr>
-                        <a:t>Fleet Subs: 107  |  Binds: 3</a:t>
+                        <a:t>Fleet Subs: 108  |  Binds: 3</a:t>
                       </a:r>
                     </a:p>
                   </a:txBody>
@@ -3766,7 +3766,7 @@
                         <a:rPr sz="900">
                           <a:latin typeface="Segoe UI"/>
                         </a:rPr>
-                        <a:t>Non-Fleet Subs: 793  |  Binds: 22</a:t>
+                        <a:t>Non-Fleet Subs: 804  |  Binds: 22</a:t>
                       </a:r>
                     </a:p>
                   </a:txBody>
@@ -4428,7 +4428,7 @@
                           </a:solidFill>
                           <a:latin typeface="Segoe UI"/>
                         </a:rPr>
-                        <a:t>158</a:t>
+                        <a:t>170</a:t>
                       </a:r>
                     </a:p>
                   </a:txBody>
@@ -4707,7 +4707,7 @@
                           </a:solidFill>
                           <a:latin typeface="Segoe UI"/>
                         </a:rPr>
-                        <a:t>3.2%</a:t>
+                        <a:t>2.9%</a:t>
                       </a:r>
                     </a:p>
                   </a:txBody>

--- a/generated/Tier 1 Broker Scorecards/Stellar Management, Inc_Broker_Scorecard.pptx
+++ b/generated/Tier 1 Broker Scorecards/Stellar Management, Inc_Broker_Scorecard.pptx
@@ -3653,7 +3653,7 @@
                         <a:rPr sz="900">
                           <a:latin typeface="Segoe UI"/>
                         </a:rPr>
-                        <a:t>Fleet Subs: 108  |  Binds: 3</a:t>
+                        <a:t>Fleet Subs: 108  |  Binds: 4</a:t>
                       </a:r>
                     </a:p>
                   </a:txBody>
@@ -3690,7 +3690,7 @@
                         <a:rPr sz="900">
                           <a:latin typeface="Segoe UI"/>
                         </a:rPr>
-                        <a:t>Fleet Bound Premium: $294,600.21</a:t>
+                        <a:t>Fleet Bound Premium: $354,084.90</a:t>
                       </a:r>
                     </a:p>
                   </a:txBody>
@@ -3727,7 +3727,7 @@
                         <a:rPr sz="900">
                           <a:latin typeface="Segoe UI"/>
                         </a:rPr>
-                        <a:t>Fleet Book %: 41.7%</a:t>
+                        <a:t>Fleet Book %: 50.1%</a:t>
                       </a:r>
                     </a:p>
                   </a:txBody>
@@ -3766,7 +3766,7 @@
                         <a:rPr sz="900">
                           <a:latin typeface="Segoe UI"/>
                         </a:rPr>
-                        <a:t>Non-Fleet Subs: 804  |  Binds: 22</a:t>
+                        <a:t>Non-Fleet Subs: 805  |  Binds: 21</a:t>
                       </a:r>
                     </a:p>
                   </a:txBody>
@@ -3803,7 +3803,7 @@
                         <a:rPr sz="900">
                           <a:latin typeface="Segoe UI"/>
                         </a:rPr>
-                        <a:t>Non-Fleet Bound Premium: $411,471.70</a:t>
+                        <a:t>Non-Fleet Bound Premium: $351,987.01</a:t>
                       </a:r>
                     </a:p>
                   </a:txBody>
@@ -3840,7 +3840,7 @@
                         <a:rPr sz="900">
                           <a:latin typeface="Segoe UI"/>
                         </a:rPr>
-                        <a:t>Non-Fleet Book %: 58.3%</a:t>
+                        <a:t>Non-Fleet Book %: 49.9%</a:t>
                       </a:r>
                     </a:p>
                   </a:txBody>
@@ -4428,7 +4428,7 @@
                           </a:solidFill>
                           <a:latin typeface="Segoe UI"/>
                         </a:rPr>
-                        <a:t>170</a:t>
+                        <a:t>171</a:t>
                       </a:r>
                     </a:p>
                   </a:txBody>

--- a/generated/Tier 1 Broker Scorecards/Stellar Management, Inc_Broker_Scorecard.pptx
+++ b/generated/Tier 1 Broker Scorecards/Stellar Management, Inc_Broker_Scorecard.pptx
@@ -3394,7 +3394,7 @@
                         <a:rPr sz="900">
                           <a:latin typeface="Segoe UI"/>
                         </a:rPr>
-                        <a:t>Tier 1  |  2.74% / 15.00%</a:t>
+                        <a:t>Tier 1  |  2.85% / 15.00%</a:t>
                       </a:r>
                     </a:p>
                   </a:txBody>
@@ -3690,7 +3690,7 @@
                         <a:rPr sz="900">
                           <a:latin typeface="Segoe UI"/>
                         </a:rPr>
-                        <a:t>Fleet Bound Premium: $354,084.90</a:t>
+                        <a:t>Fleet Bound Premium: $334,133.59</a:t>
                       </a:r>
                     </a:p>
                   </a:txBody>
@@ -3727,7 +3727,7 @@
                         <a:rPr sz="900">
                           <a:latin typeface="Segoe UI"/>
                         </a:rPr>
-                        <a:t>Fleet Book %: 50.1%</a:t>
+                        <a:t>Fleet Book %: 47.3%</a:t>
                       </a:r>
                     </a:p>
                   </a:txBody>
@@ -3766,7 +3766,7 @@
                         <a:rPr sz="900">
                           <a:latin typeface="Segoe UI"/>
                         </a:rPr>
-                        <a:t>Non-Fleet Subs: 805  |  Binds: 21</a:t>
+                        <a:t>Non-Fleet Subs: 805  |  Binds: 22</a:t>
                       </a:r>
                     </a:p>
                   </a:txBody>
@@ -3803,7 +3803,7 @@
                         <a:rPr sz="900">
                           <a:latin typeface="Segoe UI"/>
                         </a:rPr>
-                        <a:t>Non-Fleet Bound Premium: $351,987.01</a:t>
+                        <a:t>Non-Fleet Bound Premium: $371,938.32</a:t>
                       </a:r>
                     </a:p>
                   </a:txBody>
@@ -3840,7 +3840,7 @@
                         <a:rPr sz="900">
                           <a:latin typeface="Segoe UI"/>
                         </a:rPr>
-                        <a:t>Non-Fleet Book %: 49.9%</a:t>
+                        <a:t>Non-Fleet Book %: 52.7%</a:t>
                       </a:r>
                     </a:p>
                   </a:txBody>

--- a/generated/Tier 1 Broker Scorecards/Stellar Management, Inc_Broker_Scorecard.pptx
+++ b/generated/Tier 1 Broker Scorecards/Stellar Management, Inc_Broker_Scorecard.pptx
@@ -3357,7 +3357,7 @@
                         <a:rPr sz="800">
                           <a:latin typeface="Segoe UI"/>
                         </a:rPr>
-                        <a:t>$2,606,142.41 / $2,378,115.73 / $706,071.91</a:t>
+                        <a:t>$2,606,142.41 / $2,377,074.10 / $705,030.28</a:t>
                       </a:r>
                     </a:p>
                   </a:txBody>
@@ -3394,7 +3394,7 @@
                         <a:rPr sz="900">
                           <a:latin typeface="Segoe UI"/>
                         </a:rPr>
-                        <a:t>Tier 1  |  2.85% / 15.00%</a:t>
+                        <a:t>Tier 1  |  2.61% / 15.00%</a:t>
                       </a:r>
                     </a:p>
                   </a:txBody>
@@ -3431,7 +3431,7 @@
                         <a:rPr sz="900">
                           <a:latin typeface="Segoe UI"/>
                         </a:rPr>
-                        <a:t>$3,648,599.37  (19.4% achieved)</a:t>
+                        <a:t>$3,648,599.37  (19.3% achieved)</a:t>
                       </a:r>
                     </a:p>
                   </a:txBody>
@@ -3653,7 +3653,7 @@
                         <a:rPr sz="900">
                           <a:latin typeface="Segoe UI"/>
                         </a:rPr>
-                        <a:t>Fleet Subs: 108  |  Binds: 4</a:t>
+                        <a:t>Fleet Subs: 110  |  Binds: 3</a:t>
                       </a:r>
                     </a:p>
                   </a:txBody>
@@ -3690,7 +3690,7 @@
                         <a:rPr sz="900">
                           <a:latin typeface="Segoe UI"/>
                         </a:rPr>
-                        <a:t>Fleet Bound Premium: $334,133.59</a:t>
+                        <a:t>Fleet Bound Premium: $314,394.67</a:t>
                       </a:r>
                     </a:p>
                   </a:txBody>
@@ -3727,7 +3727,7 @@
                         <a:rPr sz="900">
                           <a:latin typeface="Segoe UI"/>
                         </a:rPr>
-                        <a:t>Fleet Book %: 47.3%</a:t>
+                        <a:t>Fleet Book %: 44.6%</a:t>
                       </a:r>
                     </a:p>
                   </a:txBody>
@@ -3766,7 +3766,7 @@
                         <a:rPr sz="900">
                           <a:latin typeface="Segoe UI"/>
                         </a:rPr>
-                        <a:t>Non-Fleet Subs: 805  |  Binds: 22</a:t>
+                        <a:t>Non-Fleet Subs: 809  |  Binds: 21</a:t>
                       </a:r>
                     </a:p>
                   </a:txBody>
@@ -3803,7 +3803,7 @@
                         <a:rPr sz="900">
                           <a:latin typeface="Segoe UI"/>
                         </a:rPr>
-                        <a:t>Non-Fleet Bound Premium: $371,938.32</a:t>
+                        <a:t>Non-Fleet Bound Premium: $390,635.61</a:t>
                       </a:r>
                     </a:p>
                   </a:txBody>
@@ -3840,7 +3840,7 @@
                         <a:rPr sz="900">
                           <a:latin typeface="Segoe UI"/>
                         </a:rPr>
-                        <a:t>Non-Fleet Book %: 52.7%</a:t>
+                        <a:t>Non-Fleet Book %: 55.4%</a:t>
                       </a:r>
                     </a:p>
                   </a:txBody>
@@ -4428,7 +4428,7 @@
                           </a:solidFill>
                           <a:latin typeface="Segoe UI"/>
                         </a:rPr>
-                        <a:t>171</a:t>
+                        <a:t>177</a:t>
                       </a:r>
                     </a:p>
                   </a:txBody>
@@ -4707,7 +4707,7 @@
                           </a:solidFill>
                           <a:latin typeface="Segoe UI"/>
                         </a:rPr>
-                        <a:t>2.9%</a:t>
+                        <a:t>2.8%</a:t>
                       </a:r>
                     </a:p>
                   </a:txBody>
@@ -5262,7 +5262,7 @@
                           </a:solidFill>
                           <a:latin typeface="Segoe UI"/>
                         </a:rPr>
-                        <a:t>$52.6K</a:t>
+                        <a:t>$51.6K</a:t>
                       </a:r>
                     </a:p>
                   </a:txBody>

--- a/generated/Tier 1 Broker Scorecards/Stellar Management, Inc_Broker_Scorecard.pptx
+++ b/generated/Tier 1 Broker Scorecards/Stellar Management, Inc_Broker_Scorecard.pptx
@@ -3394,7 +3394,7 @@
                         <a:rPr sz="900">
                           <a:latin typeface="Segoe UI"/>
                         </a:rPr>
-                        <a:t>Tier 1  |  2.61% / 15.00%</a:t>
+                        <a:t>Tier 1  |  2.78% / 15.00%</a:t>
                       </a:r>
                     </a:p>
                   </a:txBody>
@@ -3653,7 +3653,7 @@
                         <a:rPr sz="900">
                           <a:latin typeface="Segoe UI"/>
                         </a:rPr>
-                        <a:t>Fleet Subs: 110  |  Binds: 3</a:t>
+                        <a:t>Fleet Subs: 112  |  Binds: 4</a:t>
                       </a:r>
                     </a:p>
                   </a:txBody>
@@ -3690,7 +3690,7 @@
                         <a:rPr sz="900">
                           <a:latin typeface="Segoe UI"/>
                         </a:rPr>
-                        <a:t>Fleet Bound Premium: $314,394.67</a:t>
+                        <a:t>Fleet Bound Premium: $333,753.42</a:t>
                       </a:r>
                     </a:p>
                   </a:txBody>
@@ -3727,7 +3727,7 @@
                         <a:rPr sz="900">
                           <a:latin typeface="Segoe UI"/>
                         </a:rPr>
-                        <a:t>Fleet Book %: 44.6%</a:t>
+                        <a:t>Fleet Book %: 47.3%</a:t>
                       </a:r>
                     </a:p>
                   </a:txBody>
@@ -3766,7 +3766,7 @@
                         <a:rPr sz="900">
                           <a:latin typeface="Segoe UI"/>
                         </a:rPr>
-                        <a:t>Non-Fleet Subs: 809  |  Binds: 21</a:t>
+                        <a:t>Non-Fleet Subs: 822  |  Binds: 22</a:t>
                       </a:r>
                     </a:p>
                   </a:txBody>
@@ -3803,7 +3803,7 @@
                         <a:rPr sz="900">
                           <a:latin typeface="Segoe UI"/>
                         </a:rPr>
-                        <a:t>Non-Fleet Bound Premium: $390,635.61</a:t>
+                        <a:t>Non-Fleet Bound Premium: $371,276.86</a:t>
                       </a:r>
                     </a:p>
                   </a:txBody>
@@ -3840,7 +3840,7 @@
                         <a:rPr sz="900">
                           <a:latin typeface="Segoe UI"/>
                         </a:rPr>
-                        <a:t>Non-Fleet Book %: 55.4%</a:t>
+                        <a:t>Non-Fleet Book %: 52.7%</a:t>
                       </a:r>
                     </a:p>
                   </a:txBody>
@@ -4428,7 +4428,7 @@
                           </a:solidFill>
                           <a:latin typeface="Segoe UI"/>
                         </a:rPr>
-                        <a:t>177</a:t>
+                        <a:t>192</a:t>
                       </a:r>
                     </a:p>
                   </a:txBody>
@@ -4707,7 +4707,7 @@
                           </a:solidFill>
                           <a:latin typeface="Segoe UI"/>
                         </a:rPr>
-                        <a:t>2.8%</a:t>
+                        <a:t>2.6%</a:t>
                       </a:r>
                     </a:p>
                   </a:txBody>

--- a/generated/Tier 1 Broker Scorecards/Stellar Management, Inc_Broker_Scorecard.pptx
+++ b/generated/Tier 1 Broker Scorecards/Stellar Management, Inc_Broker_Scorecard.pptx
@@ -3394,7 +3394,7 @@
                         <a:rPr sz="900">
                           <a:latin typeface="Segoe UI"/>
                         </a:rPr>
-                        <a:t>Tier 1  |  2.78% / 15.00%</a:t>
+                        <a:t>Tier 1  |  2.76% / 15.00%</a:t>
                       </a:r>
                     </a:p>
                   </a:txBody>
@@ -3653,7 +3653,7 @@
                         <a:rPr sz="900">
                           <a:latin typeface="Segoe UI"/>
                         </a:rPr>
-                        <a:t>Fleet Subs: 112  |  Binds: 4</a:t>
+                        <a:t>Fleet Subs: 115  |  Binds: 4</a:t>
                       </a:r>
                     </a:p>
                   </a:txBody>
@@ -3766,7 +3766,7 @@
                         <a:rPr sz="900">
                           <a:latin typeface="Segoe UI"/>
                         </a:rPr>
-                        <a:t>Non-Fleet Subs: 822  |  Binds: 22</a:t>
+                        <a:t>Non-Fleet Subs: 827  |  Binds: 22</a:t>
                       </a:r>
                     </a:p>
                   </a:txBody>
@@ -4428,7 +4428,7 @@
                           </a:solidFill>
                           <a:latin typeface="Segoe UI"/>
                         </a:rPr>
-                        <a:t>192</a:t>
+                        <a:t>200</a:t>
                       </a:r>
                     </a:p>
                   </a:txBody>
@@ -4707,7 +4707,7 @@
                           </a:solidFill>
                           <a:latin typeface="Segoe UI"/>
                         </a:rPr>
-                        <a:t>2.6%</a:t>
+                        <a:t>2.5%</a:t>
                       </a:r>
                     </a:p>
                   </a:txBody>

--- a/generated/Tier 1 Broker Scorecards/Stellar Management, Inc_Broker_Scorecard.pptx
+++ b/generated/Tier 1 Broker Scorecards/Stellar Management, Inc_Broker_Scorecard.pptx
@@ -3357,7 +3357,7 @@
                         <a:rPr sz="800">
                           <a:latin typeface="Segoe UI"/>
                         </a:rPr>
-                        <a:t>$2,606,142.41 / $2,377,074.10 / $705,030.28</a:t>
+                        <a:t>$2,606,142.41 / $2,404,739.03 / $732,695.21</a:t>
                       </a:r>
                     </a:p>
                   </a:txBody>
@@ -3394,7 +3394,7 @@
                         <a:rPr sz="900">
                           <a:latin typeface="Segoe UI"/>
                         </a:rPr>
-                        <a:t>Tier 1  |  2.76% / 15.00%</a:t>
+                        <a:t>Tier 1  |  2.84% / 15.00%</a:t>
                       </a:r>
                     </a:p>
                   </a:txBody>
@@ -3431,7 +3431,7 @@
                         <a:rPr sz="900">
                           <a:latin typeface="Segoe UI"/>
                         </a:rPr>
-                        <a:t>$3,648,599.37  (19.3% achieved)</a:t>
+                        <a:t>$3,648,599.37  (20.1% achieved)</a:t>
                       </a:r>
                     </a:p>
                   </a:txBody>
@@ -3653,7 +3653,7 @@
                         <a:rPr sz="900">
                           <a:latin typeface="Segoe UI"/>
                         </a:rPr>
-                        <a:t>Fleet Subs: 115  |  Binds: 4</a:t>
+                        <a:t>Fleet Subs: 116  |  Binds: 4</a:t>
                       </a:r>
                     </a:p>
                   </a:txBody>
@@ -3690,7 +3690,7 @@
                         <a:rPr sz="900">
                           <a:latin typeface="Segoe UI"/>
                         </a:rPr>
-                        <a:t>Fleet Bound Premium: $333,753.42</a:t>
+                        <a:t>Fleet Bound Premium: $338,399.53</a:t>
                       </a:r>
                     </a:p>
                   </a:txBody>
@@ -3727,7 +3727,7 @@
                         <a:rPr sz="900">
                           <a:latin typeface="Segoe UI"/>
                         </a:rPr>
-                        <a:t>Fleet Book %: 47.3%</a:t>
+                        <a:t>Fleet Book %: 46.2%</a:t>
                       </a:r>
                     </a:p>
                   </a:txBody>
@@ -3766,7 +3766,7 @@
                         <a:rPr sz="900">
                           <a:latin typeface="Segoe UI"/>
                         </a:rPr>
-                        <a:t>Non-Fleet Subs: 827  |  Binds: 22</a:t>
+                        <a:t>Non-Fleet Subs: 835  |  Binds: 23</a:t>
                       </a:r>
                     </a:p>
                   </a:txBody>
@@ -3803,7 +3803,7 @@
                         <a:rPr sz="900">
                           <a:latin typeface="Segoe UI"/>
                         </a:rPr>
-                        <a:t>Non-Fleet Bound Premium: $371,276.86</a:t>
+                        <a:t>Non-Fleet Bound Premium: $394,295.68</a:t>
                       </a:r>
                     </a:p>
                   </a:txBody>
@@ -3840,7 +3840,7 @@
                         <a:rPr sz="900">
                           <a:latin typeface="Segoe UI"/>
                         </a:rPr>
-                        <a:t>Non-Fleet Book %: 52.7%</a:t>
+                        <a:t>Non-Fleet Book %: 53.8%</a:t>
                       </a:r>
                     </a:p>
                   </a:txBody>
@@ -4428,7 +4428,7 @@
                           </a:solidFill>
                           <a:latin typeface="Segoe UI"/>
                         </a:rPr>
-                        <a:t>200</a:t>
+                        <a:t>210</a:t>
                       </a:r>
                     </a:p>
                   </a:txBody>
@@ -4707,7 +4707,7 @@
                           </a:solidFill>
                           <a:latin typeface="Segoe UI"/>
                         </a:rPr>
-                        <a:t>2.5%</a:t>
+                        <a:t>2.9%</a:t>
                       </a:r>
                     </a:p>
                   </a:txBody>
@@ -4983,7 +4983,7 @@
                           </a:solidFill>
                           <a:latin typeface="Segoe UI"/>
                         </a:rPr>
-                        <a:t>5</a:t>
+                        <a:t>6</a:t>
                       </a:r>
                     </a:p>
                   </a:txBody>
@@ -5262,7 +5262,7 @@
                           </a:solidFill>
                           <a:latin typeface="Segoe UI"/>
                         </a:rPr>
-                        <a:t>$51.6K</a:t>
+                        <a:t>$79.2K</a:t>
                       </a:r>
                     </a:p>
                   </a:txBody>

--- a/generated/Tier 1 Broker Scorecards/Stellar Management, Inc_Broker_Scorecard.pptx
+++ b/generated/Tier 1 Broker Scorecards/Stellar Management, Inc_Broker_Scorecard.pptx
@@ -3394,7 +3394,7 @@
                         <a:rPr sz="900">
                           <a:latin typeface="Segoe UI"/>
                         </a:rPr>
-                        <a:t>Tier 1  |  2.84% / 15.00%</a:t>
+                        <a:t>Tier 1  |  2.73% / 15.00%</a:t>
                       </a:r>
                     </a:p>
                   </a:txBody>
@@ -3653,7 +3653,7 @@
                         <a:rPr sz="900">
                           <a:latin typeface="Segoe UI"/>
                         </a:rPr>
-                        <a:t>Fleet Subs: 116  |  Binds: 4</a:t>
+                        <a:t>Fleet Subs: 116  |  Binds: 3</a:t>
                       </a:r>
                     </a:p>
                   </a:txBody>
@@ -3690,7 +3690,7 @@
                         <a:rPr sz="900">
                           <a:latin typeface="Segoe UI"/>
                         </a:rPr>
-                        <a:t>Fleet Bound Premium: $338,399.53</a:t>
+                        <a:t>Fleet Bound Premium: $297,612.90</a:t>
                       </a:r>
                     </a:p>
                   </a:txBody>
@@ -3727,7 +3727,7 @@
                         <a:rPr sz="900">
                           <a:latin typeface="Segoe UI"/>
                         </a:rPr>
-                        <a:t>Fleet Book %: 46.2%</a:t>
+                        <a:t>Fleet Book %: 40.6%</a:t>
                       </a:r>
                     </a:p>
                   </a:txBody>
@@ -3803,7 +3803,7 @@
                         <a:rPr sz="900">
                           <a:latin typeface="Segoe UI"/>
                         </a:rPr>
-                        <a:t>Non-Fleet Bound Premium: $394,295.68</a:t>
+                        <a:t>Non-Fleet Bound Premium: $435,082.31</a:t>
                       </a:r>
                     </a:p>
                   </a:txBody>
@@ -3840,7 +3840,7 @@
                         <a:rPr sz="900">
                           <a:latin typeface="Segoe UI"/>
                         </a:rPr>
-                        <a:t>Non-Fleet Book %: 53.8%</a:t>
+                        <a:t>Non-Fleet Book %: 59.4%</a:t>
                       </a:r>
                     </a:p>
                   </a:txBody>

--- a/generated/Tier 1 Broker Scorecards/Stellar Management, Inc_Broker_Scorecard.pptx
+++ b/generated/Tier 1 Broker Scorecards/Stellar Management, Inc_Broker_Scorecard.pptx
@@ -3357,7 +3357,7 @@
                         <a:rPr sz="800">
                           <a:latin typeface="Segoe UI"/>
                         </a:rPr>
-                        <a:t>$2,606,142.41 / $2,404,739.03 / $732,695.21</a:t>
+                        <a:t>$2,606,142.41 / $2,169,035.47 / $732,695.21</a:t>
                       </a:r>
                     </a:p>
                   </a:txBody>
@@ -3653,7 +3653,7 @@
                         <a:rPr sz="900">
                           <a:latin typeface="Segoe UI"/>
                         </a:rPr>
-                        <a:t>Fleet Subs: 116  |  Binds: 3</a:t>
+                        <a:t>Fleet Subs: 116  |  Binds: 4</a:t>
                       </a:r>
                     </a:p>
                   </a:txBody>
@@ -3690,7 +3690,7 @@
                         <a:rPr sz="900">
                           <a:latin typeface="Segoe UI"/>
                         </a:rPr>
-                        <a:t>Fleet Bound Premium: $297,612.90</a:t>
+                        <a:t>Fleet Bound Premium: $358,091.69</a:t>
                       </a:r>
                     </a:p>
                   </a:txBody>
@@ -3727,7 +3727,7 @@
                         <a:rPr sz="900">
                           <a:latin typeface="Segoe UI"/>
                         </a:rPr>
-                        <a:t>Fleet Book %: 40.6%</a:t>
+                        <a:t>Fleet Book %: 48.9%</a:t>
                       </a:r>
                     </a:p>
                   </a:txBody>
@@ -3766,7 +3766,7 @@
                         <a:rPr sz="900">
                           <a:latin typeface="Segoe UI"/>
                         </a:rPr>
-                        <a:t>Non-Fleet Subs: 835  |  Binds: 23</a:t>
+                        <a:t>Non-Fleet Subs: 835  |  Binds: 22</a:t>
                       </a:r>
                     </a:p>
                   </a:txBody>
@@ -3803,7 +3803,7 @@
                         <a:rPr sz="900">
                           <a:latin typeface="Segoe UI"/>
                         </a:rPr>
-                        <a:t>Non-Fleet Bound Premium: $435,082.31</a:t>
+                        <a:t>Non-Fleet Bound Premium: $374,603.52</a:t>
                       </a:r>
                     </a:p>
                   </a:txBody>
@@ -3840,7 +3840,7 @@
                         <a:rPr sz="900">
                           <a:latin typeface="Segoe UI"/>
                         </a:rPr>
-                        <a:t>Non-Fleet Book %: 59.4%</a:t>
+                        <a:t>Non-Fleet Book %: 51.1%</a:t>
                       </a:r>
                     </a:p>
                   </a:txBody>
